--- a/docs/Agent 구조.pptx
+++ b/docs/Agent 구조.pptx
@@ -6,6 +6,7 @@
   </p:sldMasterIdLst>
   <p:sldIdLst>
     <p:sldId id="256" r:id="rId2"/>
+    <p:sldId id="257" r:id="rId3"/>
   </p:sldIdLst>
   <p:sldSz cx="12192000" cy="6858000"/>
   <p:notesSz cx="6858000" cy="9144000"/>
@@ -104,6 +105,11 @@
       </a:defRPr>
     </a:lvl9pPr>
   </p:defaultTextStyle>
+  <p:extLst>
+    <p:ext uri="{EFAFB233-063F-42B5-8137-9DF3F51BA10A}">
+      <p15:sldGuideLst xmlns:p15="http://schemas.microsoft.com/office/powerpoint/2012/main"/>
+    </p:ext>
+  </p:extLst>
 </p:presentation>
 </file>
 
@@ -254,7 +260,7 @@
           <a:p>
             <a:fld id="{277C1B48-2188-4728-A479-2BEE26D39293}" type="datetimeFigureOut">
               <a:rPr lang="ko-KR" altLang="en-US" smtClean="0"/>
-              <a:t>2026-07-03</a:t>
+              <a:t>2026-07-05</a:t>
             </a:fld>
             <a:endParaRPr lang="ko-KR" altLang="en-US"/>
           </a:p>
@@ -452,7 +458,7 @@
           <a:p>
             <a:fld id="{277C1B48-2188-4728-A479-2BEE26D39293}" type="datetimeFigureOut">
               <a:rPr lang="ko-KR" altLang="en-US" smtClean="0"/>
-              <a:t>2026-07-03</a:t>
+              <a:t>2026-07-05</a:t>
             </a:fld>
             <a:endParaRPr lang="ko-KR" altLang="en-US"/>
           </a:p>
@@ -660,7 +666,7 @@
           <a:p>
             <a:fld id="{277C1B48-2188-4728-A479-2BEE26D39293}" type="datetimeFigureOut">
               <a:rPr lang="ko-KR" altLang="en-US" smtClean="0"/>
-              <a:t>2026-07-03</a:t>
+              <a:t>2026-07-05</a:t>
             </a:fld>
             <a:endParaRPr lang="ko-KR" altLang="en-US"/>
           </a:p>
@@ -858,7 +864,7 @@
           <a:p>
             <a:fld id="{277C1B48-2188-4728-A479-2BEE26D39293}" type="datetimeFigureOut">
               <a:rPr lang="ko-KR" altLang="en-US" smtClean="0"/>
-              <a:t>2026-07-03</a:t>
+              <a:t>2026-07-05</a:t>
             </a:fld>
             <a:endParaRPr lang="ko-KR" altLang="en-US"/>
           </a:p>
@@ -1133,7 +1139,7 @@
           <a:p>
             <a:fld id="{277C1B48-2188-4728-A479-2BEE26D39293}" type="datetimeFigureOut">
               <a:rPr lang="ko-KR" altLang="en-US" smtClean="0"/>
-              <a:t>2026-07-03</a:t>
+              <a:t>2026-07-05</a:t>
             </a:fld>
             <a:endParaRPr lang="ko-KR" altLang="en-US"/>
           </a:p>
@@ -1398,7 +1404,7 @@
           <a:p>
             <a:fld id="{277C1B48-2188-4728-A479-2BEE26D39293}" type="datetimeFigureOut">
               <a:rPr lang="ko-KR" altLang="en-US" smtClean="0"/>
-              <a:t>2026-07-03</a:t>
+              <a:t>2026-07-05</a:t>
             </a:fld>
             <a:endParaRPr lang="ko-KR" altLang="en-US"/>
           </a:p>
@@ -1810,7 +1816,7 @@
           <a:p>
             <a:fld id="{277C1B48-2188-4728-A479-2BEE26D39293}" type="datetimeFigureOut">
               <a:rPr lang="ko-KR" altLang="en-US" smtClean="0"/>
-              <a:t>2026-07-03</a:t>
+              <a:t>2026-07-05</a:t>
             </a:fld>
             <a:endParaRPr lang="ko-KR" altLang="en-US"/>
           </a:p>
@@ -1951,7 +1957,7 @@
           <a:p>
             <a:fld id="{277C1B48-2188-4728-A479-2BEE26D39293}" type="datetimeFigureOut">
               <a:rPr lang="ko-KR" altLang="en-US" smtClean="0"/>
-              <a:t>2026-07-03</a:t>
+              <a:t>2026-07-05</a:t>
             </a:fld>
             <a:endParaRPr lang="ko-KR" altLang="en-US"/>
           </a:p>
@@ -2064,7 +2070,7 @@
           <a:p>
             <a:fld id="{277C1B48-2188-4728-A479-2BEE26D39293}" type="datetimeFigureOut">
               <a:rPr lang="ko-KR" altLang="en-US" smtClean="0"/>
-              <a:t>2026-07-03</a:t>
+              <a:t>2026-07-05</a:t>
             </a:fld>
             <a:endParaRPr lang="ko-KR" altLang="en-US"/>
           </a:p>
@@ -2375,7 +2381,7 @@
           <a:p>
             <a:fld id="{277C1B48-2188-4728-A479-2BEE26D39293}" type="datetimeFigureOut">
               <a:rPr lang="ko-KR" altLang="en-US" smtClean="0"/>
-              <a:t>2026-07-03</a:t>
+              <a:t>2026-07-05</a:t>
             </a:fld>
             <a:endParaRPr lang="ko-KR" altLang="en-US"/>
           </a:p>
@@ -2663,7 +2669,7 @@
           <a:p>
             <a:fld id="{277C1B48-2188-4728-A479-2BEE26D39293}" type="datetimeFigureOut">
               <a:rPr lang="ko-KR" altLang="en-US" smtClean="0"/>
-              <a:t>2026-07-03</a:t>
+              <a:t>2026-07-05</a:t>
             </a:fld>
             <a:endParaRPr lang="ko-KR" altLang="en-US"/>
           </a:p>
@@ -2904,7 +2910,7 @@
           <a:p>
             <a:fld id="{277C1B48-2188-4728-A479-2BEE26D39293}" type="datetimeFigureOut">
               <a:rPr lang="ko-KR" altLang="en-US" smtClean="0"/>
-              <a:t>2026-07-03</a:t>
+              <a:t>2026-07-05</a:t>
             </a:fld>
             <a:endParaRPr lang="ko-KR" altLang="en-US"/>
           </a:p>
@@ -3335,10 +3341,10 @@
         </p:nvGrpSpPr>
         <p:grpSpPr>
           <a:xfrm>
-            <a:off x="1219200" y="1162050"/>
-            <a:ext cx="8486774" cy="2828925"/>
+            <a:off x="1123950" y="1076325"/>
+            <a:ext cx="9267824" cy="3048000"/>
             <a:chOff x="1219200" y="1162050"/>
-            <a:chExt cx="8486774" cy="2828925"/>
+            <a:chExt cx="9267824" cy="3048000"/>
           </a:xfrm>
         </p:grpSpPr>
         <p:sp>
@@ -3411,8 +3417,8 @@
           </p:nvSpPr>
           <p:spPr>
             <a:xfrm>
-              <a:off x="6296024" y="1162050"/>
-              <a:ext cx="3409950" cy="962025"/>
+              <a:off x="6296023" y="1162050"/>
+              <a:ext cx="4191001" cy="1381125"/>
             </a:xfrm>
             <a:prstGeom prst="ellipse">
               <a:avLst/>
@@ -3446,7 +3452,15 @@
               </a:br>
               <a:r>
                 <a:rPr lang="en-US" altLang="ko-KR" dirty="0"/>
-                <a:t>(A2A)</a:t>
+                <a:t>(</a:t>
+              </a:r>
+              <a:r>
+                <a:rPr lang="en-US" altLang="ko-KR" dirty="0" err="1"/>
+                <a:t>Bigquery</a:t>
+              </a:r>
+              <a:r>
+                <a:rPr lang="en-US" altLang="ko-KR" dirty="0"/>
+                <a:t> conversational analytics agent)</a:t>
               </a:r>
               <a:endParaRPr lang="ko-KR" altLang="en-US" dirty="0"/>
             </a:p>
@@ -3467,7 +3481,7 @@
           <p:spPr>
             <a:xfrm>
               <a:off x="5943599" y="3028950"/>
-              <a:ext cx="3762375" cy="962025"/>
+              <a:ext cx="4114801" cy="1181100"/>
             </a:xfrm>
             <a:prstGeom prst="ellipse">
               <a:avLst/>
@@ -3517,6 +3531,7 @@
               </a:extLst>
             </p:cNvPr>
             <p:cNvCxnSpPr>
+              <a:cxnSpLocks/>
               <a:stCxn id="4" idx="6"/>
               <a:endCxn id="5" idx="2"/>
             </p:cNvCxnSpPr>
@@ -3524,8 +3539,8 @@
           </p:nvCxnSpPr>
           <p:spPr>
             <a:xfrm flipV="1">
-              <a:off x="3905250" y="1643063"/>
-              <a:ext cx="2390774" cy="1066800"/>
+              <a:off x="3905250" y="1852613"/>
+              <a:ext cx="2390773" cy="857250"/>
             </a:xfrm>
             <a:prstGeom prst="straightConnector1">
               <a:avLst/>
@@ -3568,7 +3583,7 @@
           <p:spPr>
             <a:xfrm>
               <a:off x="3905250" y="2709863"/>
-              <a:ext cx="2038349" cy="800100"/>
+              <a:ext cx="2038349" cy="909637"/>
             </a:xfrm>
             <a:prstGeom prst="straightConnector1">
               <a:avLst/>
@@ -3597,6 +3612,217 @@
     <p:extLst>
       <p:ext uri="{BB962C8B-B14F-4D97-AF65-F5344CB8AC3E}">
         <p14:creationId xmlns:p14="http://schemas.microsoft.com/office/powerpoint/2010/main" val="3113641485"/>
+      </p:ext>
+    </p:extLst>
+  </p:cSld>
+  <p:clrMapOvr>
+    <a:masterClrMapping/>
+  </p:clrMapOvr>
+</p:sld>
+</file>
+
+<file path=ppt/slides/slide2.xml><?xml version="1.0" encoding="utf-8"?>
+<p:sld xmlns:a="http://schemas.openxmlformats.org/drawingml/2006/main" xmlns:r="http://schemas.openxmlformats.org/officeDocument/2006/relationships" xmlns:p="http://schemas.openxmlformats.org/presentationml/2006/main">
+  <p:cSld>
+    <p:spTree>
+      <p:nvGrpSpPr>
+        <p:cNvPr id="1" name="">
+          <a:extLst>
+            <a:ext uri="{FF2B5EF4-FFF2-40B4-BE49-F238E27FC236}">
+              <a16:creationId xmlns:a16="http://schemas.microsoft.com/office/drawing/2014/main" id="{4DCF751C-FA70-916F-0DDD-8CC7F6714230}"/>
+            </a:ext>
+          </a:extLst>
+        </p:cNvPr>
+        <p:cNvGrpSpPr/>
+        <p:nvPr/>
+      </p:nvGrpSpPr>
+      <p:grpSpPr>
+        <a:xfrm>
+          <a:off x="0" y="0"/>
+          <a:ext cx="0" cy="0"/>
+          <a:chOff x="0" y="0"/>
+          <a:chExt cx="0" cy="0"/>
+        </a:xfrm>
+      </p:grpSpPr>
+      <p:grpSp>
+        <p:nvGrpSpPr>
+          <p:cNvPr id="7" name="그룹 6">
+            <a:extLst>
+              <a:ext uri="{FF2B5EF4-FFF2-40B4-BE49-F238E27FC236}">
+                <a16:creationId xmlns:a16="http://schemas.microsoft.com/office/drawing/2014/main" id="{1E8E1CEE-ED39-5E73-19B2-D55FAA07442D}"/>
+              </a:ext>
+            </a:extLst>
+          </p:cNvPr>
+          <p:cNvGrpSpPr/>
+          <p:nvPr/>
+        </p:nvGrpSpPr>
+        <p:grpSpPr>
+          <a:xfrm>
+            <a:off x="1895475" y="1771650"/>
+            <a:ext cx="8315326" cy="1209675"/>
+            <a:chOff x="1895475" y="1771650"/>
+            <a:chExt cx="8315326" cy="1209675"/>
+          </a:xfrm>
+        </p:grpSpPr>
+        <p:sp>
+          <p:nvSpPr>
+            <p:cNvPr id="4" name="타원 3">
+              <a:extLst>
+                <a:ext uri="{FF2B5EF4-FFF2-40B4-BE49-F238E27FC236}">
+                  <a16:creationId xmlns:a16="http://schemas.microsoft.com/office/drawing/2014/main" id="{BD8B0091-8352-902A-BD8C-E8A2FE9099CC}"/>
+                </a:ext>
+              </a:extLst>
+            </p:cNvPr>
+            <p:cNvSpPr/>
+            <p:nvPr/>
+          </p:nvSpPr>
+          <p:spPr>
+            <a:xfrm>
+              <a:off x="1895475" y="2019300"/>
+              <a:ext cx="2686050" cy="962025"/>
+            </a:xfrm>
+            <a:prstGeom prst="ellipse">
+              <a:avLst/>
+            </a:prstGeom>
+          </p:spPr>
+          <p:style>
+            <a:lnRef idx="2">
+              <a:schemeClr val="dk1"/>
+            </a:lnRef>
+            <a:fillRef idx="1">
+              <a:schemeClr val="lt1"/>
+            </a:fillRef>
+            <a:effectRef idx="0">
+              <a:schemeClr val="dk1"/>
+            </a:effectRef>
+            <a:fontRef idx="minor">
+              <a:schemeClr val="dk1"/>
+            </a:fontRef>
+          </p:style>
+          <p:txBody>
+            <a:bodyPr rtlCol="0" anchor="ctr"/>
+            <a:lstStyle/>
+            <a:p>
+              <a:pPr algn="ctr"/>
+              <a:r>
+                <a:rPr lang="en-US" altLang="ko-KR" dirty="0"/>
+                <a:t>Root</a:t>
+              </a:r>
+              <a:r>
+                <a:rPr lang="ko-KR" altLang="en-US" dirty="0"/>
+                <a:t> </a:t>
+              </a:r>
+              <a:r>
+                <a:rPr lang="en-US" altLang="ko-KR" dirty="0"/>
+                <a:t>Agent</a:t>
+              </a:r>
+              <a:endParaRPr lang="ko-KR" altLang="en-US" dirty="0"/>
+            </a:p>
+          </p:txBody>
+        </p:sp>
+        <p:sp>
+          <p:nvSpPr>
+            <p:cNvPr id="6" name="타원 5">
+              <a:extLst>
+                <a:ext uri="{FF2B5EF4-FFF2-40B4-BE49-F238E27FC236}">
+                  <a16:creationId xmlns:a16="http://schemas.microsoft.com/office/drawing/2014/main" id="{B71B83B1-FFB5-45DF-F612-85AA8741223D}"/>
+                </a:ext>
+              </a:extLst>
+            </p:cNvPr>
+            <p:cNvSpPr/>
+            <p:nvPr/>
+          </p:nvSpPr>
+          <p:spPr>
+            <a:xfrm>
+              <a:off x="6096000" y="1771650"/>
+              <a:ext cx="4114801" cy="1181100"/>
+            </a:xfrm>
+            <a:prstGeom prst="ellipse">
+              <a:avLst/>
+            </a:prstGeom>
+          </p:spPr>
+          <p:style>
+            <a:lnRef idx="2">
+              <a:schemeClr val="dk1"/>
+            </a:lnRef>
+            <a:fillRef idx="1">
+              <a:schemeClr val="lt1"/>
+            </a:fillRef>
+            <a:effectRef idx="0">
+              <a:schemeClr val="dk1"/>
+            </a:effectRef>
+            <a:fontRef idx="minor">
+              <a:schemeClr val="dk1"/>
+            </a:fontRef>
+          </p:style>
+          <p:txBody>
+            <a:bodyPr rtlCol="0" anchor="ctr"/>
+            <a:lstStyle/>
+            <a:p>
+              <a:pPr algn="ctr"/>
+              <a:r>
+                <a:rPr lang="ko-KR" altLang="en-US" dirty="0"/>
+                <a:t>납 시세 검색 에이전트</a:t>
+              </a:r>
+              <a:br>
+                <a:rPr lang="en-US" altLang="ko-KR" dirty="0"/>
+              </a:br>
+              <a:r>
+                <a:rPr lang="en-US" altLang="ko-KR" dirty="0"/>
+                <a:t>(Sub Agent: google-search)</a:t>
+              </a:r>
+              <a:endParaRPr lang="ko-KR" altLang="en-US" dirty="0"/>
+            </a:p>
+          </p:txBody>
+        </p:sp>
+        <p:cxnSp>
+          <p:nvCxnSpPr>
+            <p:cNvPr id="9" name="직선 화살표 연결선 8">
+              <a:extLst>
+                <a:ext uri="{FF2B5EF4-FFF2-40B4-BE49-F238E27FC236}">
+                  <a16:creationId xmlns:a16="http://schemas.microsoft.com/office/drawing/2014/main" id="{B0593713-A7C1-F701-8634-4F77467C55ED}"/>
+                </a:ext>
+              </a:extLst>
+            </p:cNvPr>
+            <p:cNvCxnSpPr>
+              <a:cxnSpLocks/>
+              <a:stCxn id="4" idx="6"/>
+              <a:endCxn id="6" idx="2"/>
+            </p:cNvCxnSpPr>
+            <p:nvPr/>
+          </p:nvCxnSpPr>
+          <p:spPr>
+            <a:xfrm flipV="1">
+              <a:off x="4581525" y="2362200"/>
+              <a:ext cx="1514475" cy="138113"/>
+            </a:xfrm>
+            <a:prstGeom prst="straightConnector1">
+              <a:avLst/>
+            </a:prstGeom>
+            <a:ln>
+              <a:tailEnd type="triangle"/>
+            </a:ln>
+          </p:spPr>
+          <p:style>
+            <a:lnRef idx="1">
+              <a:schemeClr val="dk1"/>
+            </a:lnRef>
+            <a:fillRef idx="0">
+              <a:schemeClr val="dk1"/>
+            </a:fillRef>
+            <a:effectRef idx="0">
+              <a:schemeClr val="dk1"/>
+            </a:effectRef>
+            <a:fontRef idx="minor">
+              <a:schemeClr val="tx1"/>
+            </a:fontRef>
+          </p:style>
+        </p:cxnSp>
+      </p:grpSp>
+    </p:spTree>
+    <p:extLst>
+      <p:ext uri="{BB962C8B-B14F-4D97-AF65-F5344CB8AC3E}">
+        <p14:creationId xmlns:p14="http://schemas.microsoft.com/office/powerpoint/2010/main" val="2701146385"/>
       </p:ext>
     </p:extLst>
   </p:cSld>
